--- a/documents/화면설계서_귀기울임.pptx
+++ b/documents/화면설계서_귀기울임.pptx
@@ -18073,7 +18073,7 @@
                 <a:cs typeface="맑은 고딕"/>
                 <a:sym typeface="맑은 고딕"/>
               </a:rPr>
-              <a:t> [</a:t>
+              <a:t> [T] 현실적인 조언형 : 객관적 상황 분석 및 문제 해결 중심</a:t>
             </a:r>
             <a:r>
               <a:rPr lang="ko-KR" sz="1200" b="0" i="0" dirty="0" err="1">
@@ -18085,7 +18085,7 @@
                 <a:cs typeface="맑은 고딕"/>
                 <a:sym typeface="맑은 고딕"/>
               </a:rPr>
-              <a:t>T</a:t>
+              <a:t/>
             </a:r>
             <a:r>
               <a:rPr lang="ko-KR" sz="1200" b="0" i="0" dirty="0">
@@ -18097,7 +18097,7 @@
                 <a:cs typeface="맑은 고딕"/>
                 <a:sym typeface="맑은 고딕"/>
               </a:rPr>
-              <a:t>] 현실적인 조언형 : 객관적 상황 분석 및 문제 해결 중심</a:t>
+              <a:t/>
             </a:r>
           </a:p>
           <a:p>
